--- a/outputs/PPT5_Unit5_Graph_Coloring.pptx
+++ b/outputs/PPT5_Unit5_Graph_Coloring.pptx
@@ -1906,7 +1906,7 @@
                 <a:ea typeface="Arial" pitchFamily="34" charset="-122"/>
                 <a:cs typeface="Arial" pitchFamily="34" charset="-120"/>
               </a:rPr>
-              <a:t>NAME :   SRinivas Rao Tammireddy</a:t>
+              <a:t>NAME :   Srinivas Rao Tammireddy</a:t>
             </a:r>
             <a:endParaRPr lang="en-US" sz="1200" dirty="0"/>
           </a:p>

--- a/outputs/PPT5_Unit5_Graph_Coloring.pptx
+++ b/outputs/PPT5_Unit5_Graph_Coloring.pptx
@@ -2904,9 +2904,9 @@
           <p:nvPr/>
         </p:nvSpPr>
         <p:spPr>
-          <a:xfrm>
-            <a:off x="8887968" y="2880360"/>
-            <a:ext cx="-875081" cy="1508760"/>
+          <a:xfrm flipH="1">
+            <a:off x="8012887" y="2880360"/>
+            <a:ext cx="875081" cy="1508760"/>
           </a:xfrm>
           <a:prstGeom prst="line">
             <a:avLst/>
@@ -2929,7 +2929,7 @@
         <p:spPr>
           <a:xfrm>
             <a:off x="8012887" y="4389120"/>
-            <a:ext cx="1750162" cy="0"/>
+            <a:ext cx="1750162" cy="9144"/>
           </a:xfrm>
           <a:prstGeom prst="line">
             <a:avLst/>
@@ -2951,8 +2951,8 @@
         </p:nvSpPr>
         <p:spPr>
           <a:xfrm>
-            <a:off x="9763049" y="4389120"/>
-            <a:ext cx="-875081" cy="-1508760"/>
+            <a:off x="8887968" y="2880360"/>
+            <a:ext cx="875081" cy="1508760"/>
           </a:xfrm>
           <a:prstGeom prst="line">
             <a:avLst/>
